--- a/备选资产/结构图/技术路线流程-001/example.pptx
+++ b/备选资产/结构图/技术路线流程-001/example.pptx
@@ -2,13 +2,13 @@
 <file path=ppt/presentation.xml><?xml version="1.0" encoding="utf-8"?>
 <p:presentation xmlns:p="http://schemas.openxmlformats.org/presentationml/2006/main">
   <p:sldMasterIdLst>
-    <p:sldMasterId xmlns:r="http://schemas.openxmlformats.org/officeDocument/2006/relationships" id="2147483648" r:id="R14c09348d4e34575"/>
+    <p:sldMasterId xmlns:r="http://schemas.openxmlformats.org/officeDocument/2006/relationships" id="2147483648" r:id="R0ae3a9e0c3474cd7"/>
   </p:sldMasterIdLst>
   <p:notesMasterIdLst>
-    <p:notesMasterId xmlns:r="http://schemas.openxmlformats.org/officeDocument/2006/relationships" r:id="Rba4febd48b244d88"/>
+    <p:notesMasterId xmlns:r="http://schemas.openxmlformats.org/officeDocument/2006/relationships" r:id="Rcbb3d051e3b3490d"/>
   </p:notesMasterIdLst>
   <p:sldIdLst>
-    <p:sldId xmlns:r="http://schemas.openxmlformats.org/officeDocument/2006/relationships" id="256" r:id="Rdafb21aa107d445a"/>
+    <p:sldId xmlns:r="http://schemas.openxmlformats.org/officeDocument/2006/relationships" id="256" r:id="R621b2d0140924587"/>
   </p:sldIdLst>
   <p:sldSz cx="12192000" cy="6858000"/>
   <p:notesSz cx="6858000" cy="9144000"/>
@@ -506,7 +506,7 @@
   </p:cSld>
   <p:clrMap bg1="lt1" tx1="dk1" bg2="lt2" tx2="dk2" accent1="accent1" accent2="accent2" accent3="accent3" accent4="accent4" accent5="accent5" accent6="accent6" hlink="hlink" folHlink="folHlink"/>
   <p:sldLayoutIdLst>
-    <p:sldLayoutId xmlns:r="http://schemas.openxmlformats.org/officeDocument/2006/relationships" id="2147483649" r:id="Rbfed8d16fe0440e9"/>
+    <p:sldLayoutId xmlns:r="http://schemas.openxmlformats.org/officeDocument/2006/relationships" id="2147483649" r:id="R5d5b8fdaca624f4a"/>
   </p:sldLayoutIdLst>
   <p:txStyles>
     <p:titleStyle>
@@ -1054,10 +1054,10 @@
       </p:grpSpPr>
       <p:sp>
         <p:nvSpPr>
-          <p:cNvPr id="23" name="">
+          <p:cNvPr id="25" name="">
             <a:extLst xmlns:a="http://schemas.openxmlformats.org/drawingml/2006/main">
               <a:ext uri="{FF2B5EF4-FFF2-40B4-BE49-F238E27FC236}">
-                <a16:creationId xmlns:a16="http://schemas.microsoft.com/office/drawing/2014/main" id="{5DFBC949-0E28-49B0-B161-5B9E392B493D}"/>
+                <a16:creationId xmlns:a16="http://schemas.microsoft.com/office/drawing/2014/main" id="{35FB38FF-5134-4FF9-9970-6C646EDD0B44}"/>
               </a:ext>
             </a:extLst>
           </p:cNvPr>
@@ -1115,7 +1115,7 @@
           <p:cNvPr id="2" name="">
             <a:extLst xmlns:a="http://schemas.openxmlformats.org/drawingml/2006/main">
               <a:ext uri="{FF2B5EF4-FFF2-40B4-BE49-F238E27FC236}">
-                <a16:creationId xmlns:a16="http://schemas.microsoft.com/office/drawing/2014/main" id="{BB24B494-87BB-4773-808F-268B3CBBDF81}"/>
+                <a16:creationId xmlns:a16="http://schemas.microsoft.com/office/drawing/2014/main" id="{52218BE5-41CB-4F56-941A-4CC3BBE63093}"/>
               </a:ext>
             </a:extLst>
           </p:cNvPr>
@@ -1173,7 +1173,7 @@
           <p:cNvPr id="3" name="">
             <a:extLst xmlns:a="http://schemas.openxmlformats.org/drawingml/2006/main">
               <a:ext uri="{FF2B5EF4-FFF2-40B4-BE49-F238E27FC236}">
-                <a16:creationId xmlns:a16="http://schemas.microsoft.com/office/drawing/2014/main" id="{7F19BE59-2BC4-4195-9063-ED6B0CE966B5}"/>
+                <a16:creationId xmlns:a16="http://schemas.microsoft.com/office/drawing/2014/main" id="{82467CA0-F635-490C-B0D7-83C7083C6A01}"/>
               </a:ext>
             </a:extLst>
           </p:cNvPr>
@@ -1183,9 +1183,143 @@
           <p:nvPr/>
         </p:nvSpPr>
         <p:spPr>
+          <a:xfrm xmlns:a="http://schemas.openxmlformats.org/drawingml/2006/main">
+            <a:off x="1809750" y="1219200"/>
+            <a:ext cx="8572500" cy="5105400"/>
+          </a:xfrm>
+          <a:prstGeom xmlns:a="http://schemas.openxmlformats.org/drawingml/2006/main" prst="roundRect">
+            <a:avLst>
+              <a:gd name="adj" fmla="val 2239"/>
+            </a:avLst>
+          </a:prstGeom>
+          <a:solidFill xmlns:a="http://schemas.openxmlformats.org/drawingml/2006/main">
+            <a:srgbClr val="FFFFFF"/>
+          </a:solidFill>
+          <a:ln xmlns:a="http://schemas.openxmlformats.org/drawingml/2006/main" w="9525">
+            <a:solidFill>
+              <a:srgbClr val="D7E5F1"/>
+            </a:solidFill>
+            <a:prstDash val="solid"/>
+          </a:ln>
+        </p:spPr>
+        <p:style>
+          <a:lnRef xmlns:a="http://schemas.openxmlformats.org/drawingml/2006/main" idx="0"/>
+          <a:fillRef xmlns:a="http://schemas.openxmlformats.org/drawingml/2006/main" idx="0"/>
+          <a:effectRef xmlns:a="http://schemas.openxmlformats.org/drawingml/2006/main" idx="6"/>
+          <a:fontRef xmlns:a="http://schemas.openxmlformats.org/drawingml/2006/main" idx="major"/>
+        </p:style>
+      </p:sp>
+      <p:sp>
+        <p:nvSpPr>
+          <p:cNvPr id="4" name="">
+            <a:extLst xmlns:a="http://schemas.openxmlformats.org/drawingml/2006/main">
+              <a:ext uri="{FF2B5EF4-FFF2-40B4-BE49-F238E27FC236}">
+                <a16:creationId xmlns:a16="http://schemas.microsoft.com/office/drawing/2014/main" id="{5C82E7DF-B86C-43BE-AA80-4ED26F108925}"/>
+              </a:ext>
+            </a:extLst>
+          </p:cNvPr>
+          <p:cNvSpPr>
+            <a:spLocks xmlns:a="http://schemas.openxmlformats.org/drawingml/2006/main" noGrp="1"/>
+          </p:cNvSpPr>
+          <p:nvPr/>
+        </p:nvSpPr>
+        <p:spPr>
+          <a:xfrm xmlns:a="http://schemas.openxmlformats.org/drawingml/2006/main">
+            <a:off x="1809750" y="1219200"/>
+            <a:ext cx="247650" cy="5105400"/>
+          </a:xfrm>
+          <a:prstGeom xmlns:a="http://schemas.openxmlformats.org/drawingml/2006/main" prst="parallelogram">
+            <a:avLst/>
+          </a:prstGeom>
+          <a:solidFill xmlns:a="http://schemas.openxmlformats.org/drawingml/2006/main">
+            <a:srgbClr val="173F68"/>
+          </a:solidFill>
+          <a:ln xmlns:a="http://schemas.openxmlformats.org/drawingml/2006/main" w="0">
+            <a:noFill/>
+            <a:prstDash val="solid"/>
+          </a:ln>
+        </p:spPr>
+      </p:sp>
+      <p:sp>
+        <p:nvSpPr>
+          <p:cNvPr id="5" name="">
+            <a:extLst xmlns:a="http://schemas.openxmlformats.org/drawingml/2006/main">
+              <a:ext uri="{FF2B5EF4-FFF2-40B4-BE49-F238E27FC236}">
+                <a16:creationId xmlns:a16="http://schemas.microsoft.com/office/drawing/2014/main" id="{E402CD66-6839-45B8-AD90-8988113AF5CC}"/>
+              </a:ext>
+            </a:extLst>
+          </p:cNvPr>
+          <p:cNvSpPr>
+            <a:spLocks xmlns:a="http://schemas.openxmlformats.org/drawingml/2006/main" noGrp="1"/>
+          </p:cNvSpPr>
+          <p:nvPr/>
+        </p:nvSpPr>
+        <p:spPr>
           <a:xfrm xmlns:a="http://schemas.openxmlformats.org/drawingml/2006/main" flipH="0" flipV="0">
-            <a:off x="6096000" y="1657350"/>
-            <a:ext cx="0" cy="3105150"/>
+            <a:off x="6096000" y="1714500"/>
+            <a:ext cx="0" cy="4019550"/>
+          </a:xfrm>
+          <a:prstGeom xmlns:a="http://schemas.openxmlformats.org/drawingml/2006/main" prst="line">
+            <a:avLst/>
+          </a:prstGeom>
+          <a:noFill xmlns:a="http://schemas.openxmlformats.org/drawingml/2006/main"/>
+          <a:ln xmlns:a="http://schemas.openxmlformats.org/drawingml/2006/main" w="23813">
+            <a:solidFill>
+              <a:srgbClr val="77AEE3"/>
+            </a:solidFill>
+            <a:prstDash val="solid"/>
+          </a:ln>
+        </p:spPr>
+      </p:sp>
+      <p:sp>
+        <p:nvSpPr>
+          <p:cNvPr id="6" name="">
+            <a:extLst xmlns:a="http://schemas.openxmlformats.org/drawingml/2006/main">
+              <a:ext uri="{FF2B5EF4-FFF2-40B4-BE49-F238E27FC236}">
+                <a16:creationId xmlns:a16="http://schemas.microsoft.com/office/drawing/2014/main" id="{6B5DC84E-62B1-48F4-9270-D2141A12305F}"/>
+              </a:ext>
+            </a:extLst>
+          </p:cNvPr>
+          <p:cNvSpPr>
+            <a:spLocks xmlns:a="http://schemas.openxmlformats.org/drawingml/2006/main" noGrp="1"/>
+          </p:cNvSpPr>
+          <p:nvPr/>
+        </p:nvSpPr>
+        <p:spPr>
+          <a:xfrm xmlns:a="http://schemas.openxmlformats.org/drawingml/2006/main" flipH="0" flipV="0">
+            <a:off x="3143250" y="2990850"/>
+            <a:ext cx="5905500" cy="0"/>
+          </a:xfrm>
+          <a:prstGeom xmlns:a="http://schemas.openxmlformats.org/drawingml/2006/main" prst="line">
+            <a:avLst/>
+          </a:prstGeom>
+          <a:noFill xmlns:a="http://schemas.openxmlformats.org/drawingml/2006/main"/>
+          <a:ln xmlns:a="http://schemas.openxmlformats.org/drawingml/2006/main" w="23813">
+            <a:solidFill>
+              <a:srgbClr val="77AEE3"/>
+            </a:solidFill>
+            <a:prstDash val="solid"/>
+          </a:ln>
+        </p:spPr>
+      </p:sp>
+      <p:sp>
+        <p:nvSpPr>
+          <p:cNvPr id="7" name="">
+            <a:extLst xmlns:a="http://schemas.openxmlformats.org/drawingml/2006/main">
+              <a:ext uri="{FF2B5EF4-FFF2-40B4-BE49-F238E27FC236}">
+                <a16:creationId xmlns:a16="http://schemas.microsoft.com/office/drawing/2014/main" id="{C259F85F-1261-488B-AF29-2A9B2B8967F9}"/>
+              </a:ext>
+            </a:extLst>
+          </p:cNvPr>
+          <p:cNvSpPr>
+            <a:spLocks xmlns:a="http://schemas.openxmlformats.org/drawingml/2006/main" noGrp="1"/>
+          </p:cNvSpPr>
+          <p:nvPr/>
+        </p:nvSpPr>
+        <p:spPr>
+          <a:xfrm xmlns:a="http://schemas.openxmlformats.org/drawingml/2006/main" flipH="0" flipV="0">
+            <a:off x="3143250" y="2990850"/>
+            <a:ext cx="0" cy="304800"/>
           </a:xfrm>
           <a:prstGeom xmlns:a="http://schemas.openxmlformats.org/drawingml/2006/main" prst="line">
             <a:avLst/>
@@ -1201,10 +1335,10 @@
       </p:sp>
       <p:sp>
         <p:nvSpPr>
-          <p:cNvPr id="4" name="">
+          <p:cNvPr id="8" name="">
             <a:extLst xmlns:a="http://schemas.openxmlformats.org/drawingml/2006/main">
               <a:ext uri="{FF2B5EF4-FFF2-40B4-BE49-F238E27FC236}">
-                <a16:creationId xmlns:a16="http://schemas.microsoft.com/office/drawing/2014/main" id="{84903C7F-0933-4EF0-94E5-53B80B249438}"/>
+                <a16:creationId xmlns:a16="http://schemas.microsoft.com/office/drawing/2014/main" id="{341520E4-0AC6-42D7-BDF9-702D2310D37D}"/>
               </a:ext>
             </a:extLst>
           </p:cNvPr>
@@ -1215,8 +1349,8 @@
         </p:nvSpPr>
         <p:spPr>
           <a:xfrm xmlns:a="http://schemas.openxmlformats.org/drawingml/2006/main" flipH="0" flipV="0">
-            <a:off x="2857500" y="2952750"/>
-            <a:ext cx="6477000" cy="0"/>
+            <a:off x="6096000" y="2990850"/>
+            <a:ext cx="0" cy="304800"/>
           </a:xfrm>
           <a:prstGeom xmlns:a="http://schemas.openxmlformats.org/drawingml/2006/main" prst="line">
             <a:avLst/>
@@ -1232,10 +1366,10 @@
       </p:sp>
       <p:sp>
         <p:nvSpPr>
-          <p:cNvPr id="5" name="">
+          <p:cNvPr id="9" name="">
             <a:extLst xmlns:a="http://schemas.openxmlformats.org/drawingml/2006/main">
               <a:ext uri="{FF2B5EF4-FFF2-40B4-BE49-F238E27FC236}">
-                <a16:creationId xmlns:a16="http://schemas.microsoft.com/office/drawing/2014/main" id="{0FBCFE0D-DBEE-45F8-A47C-42F1F02A3354}"/>
+                <a16:creationId xmlns:a16="http://schemas.microsoft.com/office/drawing/2014/main" id="{7E367695-5C40-4B3A-8A08-8AEF02774377}"/>
               </a:ext>
             </a:extLst>
           </p:cNvPr>
@@ -1246,8 +1380,8 @@
         </p:nvSpPr>
         <p:spPr>
           <a:xfrm xmlns:a="http://schemas.openxmlformats.org/drawingml/2006/main" flipH="0" flipV="0">
-            <a:off x="2857500" y="2952750"/>
-            <a:ext cx="0" cy="323850"/>
+            <a:off x="9048750" y="2990850"/>
+            <a:ext cx="0" cy="304800"/>
           </a:xfrm>
           <a:prstGeom xmlns:a="http://schemas.openxmlformats.org/drawingml/2006/main" prst="line">
             <a:avLst/>
@@ -1263,10 +1397,10 @@
       </p:sp>
       <p:sp>
         <p:nvSpPr>
-          <p:cNvPr id="6" name="">
+          <p:cNvPr id="10" name="">
             <a:extLst xmlns:a="http://schemas.openxmlformats.org/drawingml/2006/main">
               <a:ext uri="{FF2B5EF4-FFF2-40B4-BE49-F238E27FC236}">
-                <a16:creationId xmlns:a16="http://schemas.microsoft.com/office/drawing/2014/main" id="{D27EAAA9-3271-47B6-A96D-384AF7D837DF}"/>
+                <a16:creationId xmlns:a16="http://schemas.microsoft.com/office/drawing/2014/main" id="{D685AA11-1716-43FC-864F-8F9FDE59436A}"/>
               </a:ext>
             </a:extLst>
           </p:cNvPr>
@@ -1277,70 +1411,8 @@
         </p:nvSpPr>
         <p:spPr>
           <a:xfrm xmlns:a="http://schemas.openxmlformats.org/drawingml/2006/main" flipH="0" flipV="0">
-            <a:off x="6096000" y="2952750"/>
-            <a:ext cx="0" cy="323850"/>
-          </a:xfrm>
-          <a:prstGeom xmlns:a="http://schemas.openxmlformats.org/drawingml/2006/main" prst="line">
-            <a:avLst/>
-          </a:prstGeom>
-          <a:noFill xmlns:a="http://schemas.openxmlformats.org/drawingml/2006/main"/>
-          <a:ln xmlns:a="http://schemas.openxmlformats.org/drawingml/2006/main" w="19050">
-            <a:solidFill>
-              <a:srgbClr val="77AEE3"/>
-            </a:solidFill>
-            <a:prstDash val="solid"/>
-          </a:ln>
-        </p:spPr>
-      </p:sp>
-      <p:sp>
-        <p:nvSpPr>
-          <p:cNvPr id="7" name="">
-            <a:extLst xmlns:a="http://schemas.openxmlformats.org/drawingml/2006/main">
-              <a:ext uri="{FF2B5EF4-FFF2-40B4-BE49-F238E27FC236}">
-                <a16:creationId xmlns:a16="http://schemas.microsoft.com/office/drawing/2014/main" id="{4DF595E2-C1FC-4496-81F2-E5DF452CB6DA}"/>
-              </a:ext>
-            </a:extLst>
-          </p:cNvPr>
-          <p:cNvSpPr>
-            <a:spLocks xmlns:a="http://schemas.openxmlformats.org/drawingml/2006/main" noGrp="1"/>
-          </p:cNvSpPr>
-          <p:nvPr/>
-        </p:nvSpPr>
-        <p:spPr>
-          <a:xfrm xmlns:a="http://schemas.openxmlformats.org/drawingml/2006/main" flipH="0" flipV="0">
-            <a:off x="9334500" y="2952750"/>
-            <a:ext cx="0" cy="323850"/>
-          </a:xfrm>
-          <a:prstGeom xmlns:a="http://schemas.openxmlformats.org/drawingml/2006/main" prst="line">
-            <a:avLst/>
-          </a:prstGeom>
-          <a:noFill xmlns:a="http://schemas.openxmlformats.org/drawingml/2006/main"/>
-          <a:ln xmlns:a="http://schemas.openxmlformats.org/drawingml/2006/main" w="19050">
-            <a:solidFill>
-              <a:srgbClr val="77AEE3"/>
-            </a:solidFill>
-            <a:prstDash val="solid"/>
-          </a:ln>
-        </p:spPr>
-      </p:sp>
-      <p:sp>
-        <p:nvSpPr>
-          <p:cNvPr id="8" name="">
-            <a:extLst xmlns:a="http://schemas.openxmlformats.org/drawingml/2006/main">
-              <a:ext uri="{FF2B5EF4-FFF2-40B4-BE49-F238E27FC236}">
-                <a16:creationId xmlns:a16="http://schemas.microsoft.com/office/drawing/2014/main" id="{1293E9F7-4F72-444A-8C13-2AF17E830977}"/>
-              </a:ext>
-            </a:extLst>
-          </p:cNvPr>
-          <p:cNvSpPr>
-            <a:spLocks xmlns:a="http://schemas.openxmlformats.org/drawingml/2006/main" noGrp="1"/>
-          </p:cNvSpPr>
-          <p:nvPr/>
-        </p:nvSpPr>
-        <p:spPr>
-          <a:xfrm xmlns:a="http://schemas.openxmlformats.org/drawingml/2006/main" flipH="0" flipV="0">
-            <a:off x="3524250" y="4514850"/>
-            <a:ext cx="2571750" cy="438150"/>
+            <a:off x="3857625" y="4762500"/>
+            <a:ext cx="2238375" cy="419100"/>
           </a:xfrm>
           <a:prstGeom xmlns:a="http://schemas.openxmlformats.org/drawingml/2006/main" prst="line">
             <a:avLst/>
@@ -1356,10 +1428,10 @@
       </p:sp>
       <p:sp>
         <p:nvSpPr>
-          <p:cNvPr id="9" name="">
+          <p:cNvPr id="11" name="">
             <a:extLst xmlns:a="http://schemas.openxmlformats.org/drawingml/2006/main">
               <a:ext uri="{FF2B5EF4-FFF2-40B4-BE49-F238E27FC236}">
-                <a16:creationId xmlns:a16="http://schemas.microsoft.com/office/drawing/2014/main" id="{D6297A33-5539-4450-9479-AC25937F5A3E}"/>
+                <a16:creationId xmlns:a16="http://schemas.microsoft.com/office/drawing/2014/main" id="{3E103318-0F78-4D25-8775-54350BE4CCB1}"/>
               </a:ext>
             </a:extLst>
           </p:cNvPr>
@@ -1370,8 +1442,8 @@
         </p:nvSpPr>
         <p:spPr>
           <a:xfrm xmlns:a="http://schemas.openxmlformats.org/drawingml/2006/main" flipH="0" flipV="0">
-            <a:off x="6096000" y="4514850"/>
-            <a:ext cx="0" cy="438150"/>
+            <a:off x="6096000" y="4762500"/>
+            <a:ext cx="0" cy="419100"/>
           </a:xfrm>
           <a:prstGeom xmlns:a="http://schemas.openxmlformats.org/drawingml/2006/main" prst="line">
             <a:avLst/>
@@ -1387,10 +1459,10 @@
       </p:sp>
       <p:sp>
         <p:nvSpPr>
-          <p:cNvPr id="10" name="">
+          <p:cNvPr id="12" name="">
             <a:extLst xmlns:a="http://schemas.openxmlformats.org/drawingml/2006/main">
               <a:ext uri="{FF2B5EF4-FFF2-40B4-BE49-F238E27FC236}">
-                <a16:creationId xmlns:a16="http://schemas.microsoft.com/office/drawing/2014/main" id="{40F174DC-5789-4A6A-8D1B-B010DB394AFC}"/>
+                <a16:creationId xmlns:a16="http://schemas.microsoft.com/office/drawing/2014/main" id="{FBA0D802-2764-40ED-90EA-BA818AF8162C}"/>
               </a:ext>
             </a:extLst>
           </p:cNvPr>
@@ -1401,8 +1473,8 @@
         </p:nvSpPr>
         <p:spPr>
           <a:xfrm xmlns:a="http://schemas.openxmlformats.org/drawingml/2006/main" flipH="1" flipV="0">
-            <a:off x="6096000" y="4514850"/>
-            <a:ext cx="2571750" cy="438150"/>
+            <a:off x="6096000" y="4762500"/>
+            <a:ext cx="2238375" cy="419100"/>
           </a:xfrm>
           <a:prstGeom xmlns:a="http://schemas.openxmlformats.org/drawingml/2006/main" prst="line">
             <a:avLst/>
@@ -1418,10 +1490,10 @@
       </p:sp>
       <p:sp>
         <p:nvSpPr>
-          <p:cNvPr id="11" name="">
+          <p:cNvPr id="13" name="">
             <a:extLst xmlns:a="http://schemas.openxmlformats.org/drawingml/2006/main">
               <a:ext uri="{FF2B5EF4-FFF2-40B4-BE49-F238E27FC236}">
-                <a16:creationId xmlns:a16="http://schemas.microsoft.com/office/drawing/2014/main" id="{E65D6AD4-AE62-4A89-A45D-AD75CDDF393B}"/>
+                <a16:creationId xmlns:a16="http://schemas.microsoft.com/office/drawing/2014/main" id="{526CE81F-E182-497D-9998-2C72F9F57A0B}"/>
               </a:ext>
             </a:extLst>
           </p:cNvPr>
@@ -1432,16 +1504,16 @@
         </p:nvSpPr>
         <p:spPr>
           <a:xfrm xmlns:a="http://schemas.openxmlformats.org/drawingml/2006/main">
-            <a:off x="5381625" y="1257300"/>
-            <a:ext cx="1428750" cy="400050"/>
+            <a:off x="5381625" y="1409700"/>
+            <a:ext cx="1428750" cy="381000"/>
           </a:xfrm>
           <a:prstGeom xmlns:a="http://schemas.openxmlformats.org/drawingml/2006/main" prst="roundRect">
             <a:avLst>
-              <a:gd name="adj" fmla="val 28571"/>
+              <a:gd name="adj" fmla="val 30000"/>
             </a:avLst>
           </a:prstGeom>
           <a:solidFill xmlns:a="http://schemas.openxmlformats.org/drawingml/2006/main">
-            <a:srgbClr val="BFD9F1"/>
+            <a:srgbClr val="C9DFF3"/>
           </a:solidFill>
           <a:ln xmlns:a="http://schemas.openxmlformats.org/drawingml/2006/main" w="14288">
             <a:solidFill>
@@ -1450,9 +1522,15 @@
             <a:prstDash val="solid"/>
           </a:ln>
         </p:spPr>
+        <p:style>
+          <a:lnRef xmlns:a="http://schemas.openxmlformats.org/drawingml/2006/main" idx="0"/>
+          <a:fillRef xmlns:a="http://schemas.openxmlformats.org/drawingml/2006/main" idx="0"/>
+          <a:effectRef xmlns:a="http://schemas.openxmlformats.org/drawingml/2006/main" idx="4"/>
+          <a:fontRef xmlns:a="http://schemas.openxmlformats.org/drawingml/2006/main" idx="major"/>
+        </p:style>
         <p:txBody>
           <a:bodyPr xmlns:a="http://schemas.openxmlformats.org/drawingml/2006/main" lIns="114300" tIns="76200" rIns="114300" bIns="76200" anchor="ctr">
-            <a:normAutofit fontScale="92994"/>
+            <a:normAutofit fontScale="83189"/>
           </a:bodyPr>
           <a:lstStyle xmlns:a="http://schemas.openxmlformats.org/drawingml/2006/main"/>
           <a:p xmlns:a="http://schemas.openxmlformats.org/drawingml/2006/main">
@@ -1482,10 +1560,10 @@
       </p:sp>
       <p:sp>
         <p:nvSpPr>
-          <p:cNvPr id="12" name="">
+          <p:cNvPr id="14" name="PPAGENT_QA|parent=technical-question|domains=technical-route-main">
             <a:extLst xmlns:a="http://schemas.openxmlformats.org/drawingml/2006/main">
               <a:ext uri="{FF2B5EF4-FFF2-40B4-BE49-F238E27FC236}">
-                <a16:creationId xmlns:a16="http://schemas.microsoft.com/office/drawing/2014/main" id="{0E2D3830-BEFD-438F-9F28-D9E48BA8C618}"/>
+                <a16:creationId xmlns:a16="http://schemas.microsoft.com/office/drawing/2014/main" id="{0E4B112D-355F-48FC-84B3-053089C86E82}"/>
               </a:ext>
             </a:extLst>
           </p:cNvPr>
@@ -1496,16 +1574,354 @@
         </p:nvSpPr>
         <p:spPr>
           <a:xfrm xmlns:a="http://schemas.openxmlformats.org/drawingml/2006/main">
-            <a:off x="4524375" y="1847850"/>
-            <a:ext cx="3143250" cy="438150"/>
+            <a:off x="4524375" y="1962150"/>
+            <a:ext cx="3143250" cy="419100"/>
           </a:xfrm>
           <a:prstGeom xmlns:a="http://schemas.openxmlformats.org/drawingml/2006/main" prst="roundRect">
             <a:avLst>
-              <a:gd name="adj" fmla="val 26087"/>
+              <a:gd name="adj" fmla="val 27273"/>
             </a:avLst>
           </a:prstGeom>
           <a:solidFill xmlns:a="http://schemas.openxmlformats.org/drawingml/2006/main">
             <a:srgbClr val="C9DFF3"/>
+          </a:solidFill>
+          <a:ln xmlns:a="http://schemas.openxmlformats.org/drawingml/2006/main" w="14288">
+            <a:solidFill>
+              <a:srgbClr val="6CA7DD"/>
+            </a:solidFill>
+            <a:prstDash val="solid"/>
+          </a:ln>
+        </p:spPr>
+        <p:txBody>
+          <a:bodyPr xmlns:a="http://schemas.openxmlformats.org/drawingml/2006/main" lIns="114300" tIns="76200" rIns="114300" bIns="76200" anchor="ctr">
+            <a:normAutofit fontScale="97086"/>
+          </a:bodyPr>
+          <a:lstStyle xmlns:a="http://schemas.openxmlformats.org/drawingml/2006/main"/>
+          <a:p xmlns:a="http://schemas.openxmlformats.org/drawingml/2006/main">
+            <a:pPr algn="ctr">
+              <a:defRPr sz="1350" b="1">
+                <a:solidFill>
+                  <a:srgbClr val="205281"/>
+                </a:solidFill>
+                <a:latin typeface="Microsoft YaHei"/>
+                <a:ea typeface="Microsoft YaHei"/>
+                <a:cs typeface="Microsoft YaHei"/>
+              </a:defRPr>
+            </a:pPr>
+            <a:r>
+              <a:rPr sz="1350" b="1">
+                <a:solidFill>
+                  <a:srgbClr val="205281"/>
+                </a:solidFill>
+                <a:latin typeface="Microsoft YaHei"/>
+                <a:ea typeface="Microsoft YaHei"/>
+                <a:cs typeface="Microsoft YaHei"/>
+              </a:rPr>
+              <a:t>明确核心研究问题</a:t>
+            </a:r>
+          </a:p>
+        </p:txBody>
+      </p:sp>
+      <p:sp>
+        <p:nvSpPr>
+          <p:cNvPr id="15" name="PPAGENT_QA|parent=technical-objective|domains=technical-route-main">
+            <a:extLst xmlns:a="http://schemas.openxmlformats.org/drawingml/2006/main">
+              <a:ext uri="{FF2B5EF4-FFF2-40B4-BE49-F238E27FC236}">
+                <a16:creationId xmlns:a16="http://schemas.microsoft.com/office/drawing/2014/main" id="{C4886CEC-09FF-4A7D-8D91-AB262556B99F}"/>
+              </a:ext>
+            </a:extLst>
+          </p:cNvPr>
+          <p:cNvSpPr>
+            <a:spLocks xmlns:a="http://schemas.openxmlformats.org/drawingml/2006/main" noGrp="1"/>
+          </p:cNvSpPr>
+          <p:nvPr/>
+        </p:nvSpPr>
+        <p:spPr>
+          <a:xfrm xmlns:a="http://schemas.openxmlformats.org/drawingml/2006/main">
+            <a:off x="4524375" y="2552700"/>
+            <a:ext cx="3143250" cy="419100"/>
+          </a:xfrm>
+          <a:prstGeom xmlns:a="http://schemas.openxmlformats.org/drawingml/2006/main" prst="roundRect">
+            <a:avLst>
+              <a:gd name="adj" fmla="val 27273"/>
+            </a:avLst>
+          </a:prstGeom>
+          <a:solidFill xmlns:a="http://schemas.openxmlformats.org/drawingml/2006/main">
+            <a:srgbClr val="C9DFF3"/>
+          </a:solidFill>
+          <a:ln xmlns:a="http://schemas.openxmlformats.org/drawingml/2006/main" w="14288">
+            <a:solidFill>
+              <a:srgbClr val="6CA7DD"/>
+            </a:solidFill>
+            <a:prstDash val="solid"/>
+          </a:ln>
+        </p:spPr>
+        <p:txBody>
+          <a:bodyPr xmlns:a="http://schemas.openxmlformats.org/drawingml/2006/main" lIns="114300" tIns="76200" rIns="114300" bIns="76200" anchor="ctr">
+            <a:normAutofit fontScale="97086"/>
+          </a:bodyPr>
+          <a:lstStyle xmlns:a="http://schemas.openxmlformats.org/drawingml/2006/main"/>
+          <a:p xmlns:a="http://schemas.openxmlformats.org/drawingml/2006/main">
+            <a:pPr algn="ctr">
+              <a:defRPr sz="1350" b="1">
+                <a:solidFill>
+                  <a:srgbClr val="205281"/>
+                </a:solidFill>
+                <a:latin typeface="Microsoft YaHei"/>
+                <a:ea typeface="Microsoft YaHei"/>
+                <a:cs typeface="Microsoft YaHei"/>
+              </a:defRPr>
+            </a:pPr>
+            <a:r>
+              <a:rPr sz="1350" b="1">
+                <a:solidFill>
+                  <a:srgbClr val="205281"/>
+                </a:solidFill>
+                <a:latin typeface="Microsoft YaHei"/>
+                <a:ea typeface="Microsoft YaHei"/>
+                <a:cs typeface="Microsoft YaHei"/>
+              </a:rPr>
+              <a:t>确定整体优化目标</a:t>
+            </a:r>
+          </a:p>
+        </p:txBody>
+      </p:sp>
+      <p:sp>
+        <p:nvSpPr>
+          <p:cNvPr id="16" name="PPAGENT_QA|parent=technical-branch-0|domains=technical-route-branches">
+            <a:extLst xmlns:a="http://schemas.openxmlformats.org/drawingml/2006/main">
+              <a:ext uri="{FF2B5EF4-FFF2-40B4-BE49-F238E27FC236}">
+                <a16:creationId xmlns:a16="http://schemas.microsoft.com/office/drawing/2014/main" id="{D6BB5AC2-3FC9-448F-BDC0-20EFFD9CC5BF}"/>
+              </a:ext>
+            </a:extLst>
+          </p:cNvPr>
+          <p:cNvSpPr>
+            <a:spLocks xmlns:a="http://schemas.openxmlformats.org/drawingml/2006/main" noGrp="1"/>
+          </p:cNvSpPr>
+          <p:nvPr/>
+        </p:nvSpPr>
+        <p:spPr>
+          <a:xfrm xmlns:a="http://schemas.openxmlformats.org/drawingml/2006/main">
+            <a:off x="2266950" y="3295650"/>
+            <a:ext cx="1752600" cy="419100"/>
+          </a:xfrm>
+          <a:prstGeom xmlns:a="http://schemas.openxmlformats.org/drawingml/2006/main" prst="roundRect">
+            <a:avLst>
+              <a:gd name="adj" fmla="val 27273"/>
+            </a:avLst>
+          </a:prstGeom>
+          <a:solidFill xmlns:a="http://schemas.openxmlformats.org/drawingml/2006/main">
+            <a:srgbClr val="D6E7F6"/>
+          </a:solidFill>
+          <a:ln xmlns:a="http://schemas.openxmlformats.org/drawingml/2006/main" w="14288">
+            <a:solidFill>
+              <a:srgbClr val="6CA7DD"/>
+            </a:solidFill>
+            <a:prstDash val="solid"/>
+          </a:ln>
+        </p:spPr>
+        <p:style>
+          <a:lnRef xmlns:a="http://schemas.openxmlformats.org/drawingml/2006/main" idx="0"/>
+          <a:fillRef xmlns:a="http://schemas.openxmlformats.org/drawingml/2006/main" idx="0"/>
+          <a:effectRef xmlns:a="http://schemas.openxmlformats.org/drawingml/2006/main" idx="4"/>
+          <a:fontRef xmlns:a="http://schemas.openxmlformats.org/drawingml/2006/main" idx="major"/>
+        </p:style>
+        <p:txBody>
+          <a:bodyPr xmlns:a="http://schemas.openxmlformats.org/drawingml/2006/main" lIns="114300" tIns="76200" rIns="114300" bIns="76200" anchor="ctr">
+            <a:normAutofit fontScale="100000"/>
+          </a:bodyPr>
+          <a:lstStyle xmlns:a="http://schemas.openxmlformats.org/drawingml/2006/main"/>
+          <a:p xmlns:a="http://schemas.openxmlformats.org/drawingml/2006/main">
+            <a:pPr algn="ctr">
+              <a:defRPr sz="1200" b="0">
+                <a:solidFill>
+                  <a:srgbClr val="205281"/>
+                </a:solidFill>
+                <a:latin typeface="Microsoft YaHei"/>
+                <a:ea typeface="Microsoft YaHei"/>
+                <a:cs typeface="Microsoft YaHei"/>
+              </a:defRPr>
+            </a:pPr>
+            <a:r>
+              <a:rPr sz="1200" b="0">
+                <a:solidFill>
+                  <a:srgbClr val="205281"/>
+                </a:solidFill>
+                <a:latin typeface="Microsoft YaHei"/>
+                <a:ea typeface="Microsoft YaHei"/>
+                <a:cs typeface="Microsoft YaHei"/>
+              </a:rPr>
+              <a:t>性能目标</a:t>
+            </a:r>
+          </a:p>
+        </p:txBody>
+      </p:sp>
+      <p:sp>
+        <p:nvSpPr>
+          <p:cNvPr id="17" name="PPAGENT_QA|parent=technical-branch-1|domains=technical-route-branches">
+            <a:extLst xmlns:a="http://schemas.openxmlformats.org/drawingml/2006/main">
+              <a:ext uri="{FF2B5EF4-FFF2-40B4-BE49-F238E27FC236}">
+                <a16:creationId xmlns:a16="http://schemas.microsoft.com/office/drawing/2014/main" id="{FFF54022-AEDC-460A-9617-4767B7034BAA}"/>
+              </a:ext>
+            </a:extLst>
+          </p:cNvPr>
+          <p:cNvSpPr>
+            <a:spLocks xmlns:a="http://schemas.openxmlformats.org/drawingml/2006/main" noGrp="1"/>
+          </p:cNvSpPr>
+          <p:nvPr/>
+        </p:nvSpPr>
+        <p:spPr>
+          <a:xfrm xmlns:a="http://schemas.openxmlformats.org/drawingml/2006/main">
+            <a:off x="5219700" y="3295650"/>
+            <a:ext cx="1752600" cy="419100"/>
+          </a:xfrm>
+          <a:prstGeom xmlns:a="http://schemas.openxmlformats.org/drawingml/2006/main" prst="roundRect">
+            <a:avLst>
+              <a:gd name="adj" fmla="val 27273"/>
+            </a:avLst>
+          </a:prstGeom>
+          <a:solidFill xmlns:a="http://schemas.openxmlformats.org/drawingml/2006/main">
+            <a:srgbClr val="D6E7F6"/>
+          </a:solidFill>
+          <a:ln xmlns:a="http://schemas.openxmlformats.org/drawingml/2006/main" w="14288">
+            <a:solidFill>
+              <a:srgbClr val="6CA7DD"/>
+            </a:solidFill>
+            <a:prstDash val="solid"/>
+          </a:ln>
+        </p:spPr>
+        <p:style>
+          <a:lnRef xmlns:a="http://schemas.openxmlformats.org/drawingml/2006/main" idx="0"/>
+          <a:fillRef xmlns:a="http://schemas.openxmlformats.org/drawingml/2006/main" idx="0"/>
+          <a:effectRef xmlns:a="http://schemas.openxmlformats.org/drawingml/2006/main" idx="4"/>
+          <a:fontRef xmlns:a="http://schemas.openxmlformats.org/drawingml/2006/main" idx="major"/>
+        </p:style>
+        <p:txBody>
+          <a:bodyPr xmlns:a="http://schemas.openxmlformats.org/drawingml/2006/main" lIns="114300" tIns="76200" rIns="114300" bIns="76200" anchor="ctr">
+            <a:normAutofit fontScale="100000"/>
+          </a:bodyPr>
+          <a:lstStyle xmlns:a="http://schemas.openxmlformats.org/drawingml/2006/main"/>
+          <a:p xmlns:a="http://schemas.openxmlformats.org/drawingml/2006/main">
+            <a:pPr algn="ctr">
+              <a:defRPr sz="1200" b="0">
+                <a:solidFill>
+                  <a:srgbClr val="205281"/>
+                </a:solidFill>
+                <a:latin typeface="Microsoft YaHei"/>
+                <a:ea typeface="Microsoft YaHei"/>
+                <a:cs typeface="Microsoft YaHei"/>
+              </a:defRPr>
+            </a:pPr>
+            <a:r>
+              <a:rPr sz="1200" b="0">
+                <a:solidFill>
+                  <a:srgbClr val="205281"/>
+                </a:solidFill>
+                <a:latin typeface="Microsoft YaHei"/>
+                <a:ea typeface="Microsoft YaHei"/>
+                <a:cs typeface="Microsoft YaHei"/>
+              </a:rPr>
+              <a:t>生态目标</a:t>
+            </a:r>
+          </a:p>
+        </p:txBody>
+      </p:sp>
+      <p:sp>
+        <p:nvSpPr>
+          <p:cNvPr id="18" name="PPAGENT_QA|parent=technical-branch-2|domains=technical-route-branches">
+            <a:extLst xmlns:a="http://schemas.openxmlformats.org/drawingml/2006/main">
+              <a:ext uri="{FF2B5EF4-FFF2-40B4-BE49-F238E27FC236}">
+                <a16:creationId xmlns:a16="http://schemas.microsoft.com/office/drawing/2014/main" id="{1E2DCDE0-2352-428C-87C4-E9E5B142E8F3}"/>
+              </a:ext>
+            </a:extLst>
+          </p:cNvPr>
+          <p:cNvSpPr>
+            <a:spLocks xmlns:a="http://schemas.openxmlformats.org/drawingml/2006/main" noGrp="1"/>
+          </p:cNvSpPr>
+          <p:nvPr/>
+        </p:nvSpPr>
+        <p:spPr>
+          <a:xfrm xmlns:a="http://schemas.openxmlformats.org/drawingml/2006/main">
+            <a:off x="8172450" y="3295650"/>
+            <a:ext cx="1752600" cy="419100"/>
+          </a:xfrm>
+          <a:prstGeom xmlns:a="http://schemas.openxmlformats.org/drawingml/2006/main" prst="roundRect">
+            <a:avLst>
+              <a:gd name="adj" fmla="val 27273"/>
+            </a:avLst>
+          </a:prstGeom>
+          <a:solidFill xmlns:a="http://schemas.openxmlformats.org/drawingml/2006/main">
+            <a:srgbClr val="D6E7F6"/>
+          </a:solidFill>
+          <a:ln xmlns:a="http://schemas.openxmlformats.org/drawingml/2006/main" w="14288">
+            <a:solidFill>
+              <a:srgbClr val="6CA7DD"/>
+            </a:solidFill>
+            <a:prstDash val="solid"/>
+          </a:ln>
+        </p:spPr>
+        <p:style>
+          <a:lnRef xmlns:a="http://schemas.openxmlformats.org/drawingml/2006/main" idx="0"/>
+          <a:fillRef xmlns:a="http://schemas.openxmlformats.org/drawingml/2006/main" idx="0"/>
+          <a:effectRef xmlns:a="http://schemas.openxmlformats.org/drawingml/2006/main" idx="4"/>
+          <a:fontRef xmlns:a="http://schemas.openxmlformats.org/drawingml/2006/main" idx="major"/>
+        </p:style>
+        <p:txBody>
+          <a:bodyPr xmlns:a="http://schemas.openxmlformats.org/drawingml/2006/main" lIns="114300" tIns="76200" rIns="114300" bIns="76200" anchor="ctr">
+            <a:normAutofit fontScale="100000"/>
+          </a:bodyPr>
+          <a:lstStyle xmlns:a="http://schemas.openxmlformats.org/drawingml/2006/main"/>
+          <a:p xmlns:a="http://schemas.openxmlformats.org/drawingml/2006/main">
+            <a:pPr algn="ctr">
+              <a:defRPr sz="1200" b="0">
+                <a:solidFill>
+                  <a:srgbClr val="205281"/>
+                </a:solidFill>
+                <a:latin typeface="Microsoft YaHei"/>
+                <a:ea typeface="Microsoft YaHei"/>
+                <a:cs typeface="Microsoft YaHei"/>
+              </a:defRPr>
+            </a:pPr>
+            <a:r>
+              <a:rPr sz="1200" b="0">
+                <a:solidFill>
+                  <a:srgbClr val="205281"/>
+                </a:solidFill>
+                <a:latin typeface="Microsoft YaHei"/>
+                <a:ea typeface="Microsoft YaHei"/>
+                <a:cs typeface="Microsoft YaHei"/>
+              </a:rPr>
+              <a:t>可靠性目标</a:t>
+            </a:r>
+          </a:p>
+        </p:txBody>
+      </p:sp>
+      <p:sp>
+        <p:nvSpPr>
+          <p:cNvPr id="19" name="PPAGENT_QA|parent=technical-core|domains=technical-route-main">
+            <a:extLst xmlns:a="http://schemas.openxmlformats.org/drawingml/2006/main">
+              <a:ext uri="{FF2B5EF4-FFF2-40B4-BE49-F238E27FC236}">
+                <a16:creationId xmlns:a16="http://schemas.microsoft.com/office/drawing/2014/main" id="{B31B6986-3D2B-4173-A0AD-66D67EE0C0AF}"/>
+              </a:ext>
+            </a:extLst>
+          </p:cNvPr>
+          <p:cNvSpPr>
+            <a:spLocks xmlns:a="http://schemas.openxmlformats.org/drawingml/2006/main" noGrp="1"/>
+          </p:cNvSpPr>
+          <p:nvPr/>
+        </p:nvSpPr>
+        <p:spPr>
+          <a:xfrm xmlns:a="http://schemas.openxmlformats.org/drawingml/2006/main">
+            <a:off x="4238625" y="3962400"/>
+            <a:ext cx="3714750" cy="457200"/>
+          </a:xfrm>
+          <a:prstGeom xmlns:a="http://schemas.openxmlformats.org/drawingml/2006/main" prst="roundRect">
+            <a:avLst>
+              <a:gd name="adj" fmla="val 25000"/>
+            </a:avLst>
+          </a:prstGeom>
+          <a:solidFill xmlns:a="http://schemas.openxmlformats.org/drawingml/2006/main">
+            <a:srgbClr val="BFD9F1"/>
           </a:solidFill>
           <a:ln xmlns:a="http://schemas.openxmlformats.org/drawingml/2006/main" w="14288">
             <a:solidFill>
@@ -1539,17 +1955,17 @@
                 <a:ea typeface="Microsoft YaHei"/>
                 <a:cs typeface="Microsoft YaHei"/>
               </a:rPr>
-              <a:t>明确核心研究问题</a:t>
+              <a:t>构建多目标分析与决策模型</a:t>
             </a:r>
           </a:p>
         </p:txBody>
       </p:sp>
       <p:sp>
         <p:nvSpPr>
-          <p:cNvPr id="13" name="">
+          <p:cNvPr id="20" name="PPAGENT_QA|parent=technical-input-0|domains=technical-route-inputs">
             <a:extLst xmlns:a="http://schemas.openxmlformats.org/drawingml/2006/main">
               <a:ext uri="{FF2B5EF4-FFF2-40B4-BE49-F238E27FC236}">
-                <a16:creationId xmlns:a16="http://schemas.microsoft.com/office/drawing/2014/main" id="{226CA4FA-E544-42DB-9F4D-F298D0B65283}"/>
+                <a16:creationId xmlns:a16="http://schemas.microsoft.com/office/drawing/2014/main" id="{5D8A7645-016A-4B20-957B-A9F24219A1E9}"/>
               </a:ext>
             </a:extLst>
           </p:cNvPr>
@@ -1560,16 +1976,202 @@
         </p:nvSpPr>
         <p:spPr>
           <a:xfrm xmlns:a="http://schemas.openxmlformats.org/drawingml/2006/main">
-            <a:off x="4524375" y="2438400"/>
-            <a:ext cx="3143250" cy="438150"/>
+            <a:off x="3019425" y="4572000"/>
+            <a:ext cx="1676400" cy="381000"/>
+          </a:xfrm>
+          <a:prstGeom xmlns:a="http://schemas.openxmlformats.org/drawingml/2006/main" prst="parallelogram">
+            <a:avLst/>
+          </a:prstGeom>
+          <a:solidFill xmlns:a="http://schemas.openxmlformats.org/drawingml/2006/main">
+            <a:srgbClr val="E6F0F8"/>
+          </a:solidFill>
+          <a:ln xmlns:a="http://schemas.openxmlformats.org/drawingml/2006/main" w="14288">
+            <a:solidFill>
+              <a:srgbClr val="6CA7DD"/>
+            </a:solidFill>
+            <a:prstDash val="solid"/>
+          </a:ln>
+        </p:spPr>
+        <p:txBody>
+          <a:bodyPr xmlns:a="http://schemas.openxmlformats.org/drawingml/2006/main" lIns="114300" tIns="76200" rIns="114300" bIns="76200" anchor="ctr">
+            <a:normAutofit fontScale="80413"/>
+          </a:bodyPr>
+          <a:lstStyle xmlns:a="http://schemas.openxmlformats.org/drawingml/2006/main"/>
+          <a:p xmlns:a="http://schemas.openxmlformats.org/drawingml/2006/main">
+            <a:pPr algn="ctr">
+              <a:defRPr sz="1200" b="0">
+                <a:solidFill>
+                  <a:srgbClr val="205281"/>
+                </a:solidFill>
+                <a:latin typeface="Microsoft YaHei"/>
+                <a:ea typeface="Microsoft YaHei"/>
+                <a:cs typeface="Microsoft YaHei"/>
+              </a:defRPr>
+            </a:pPr>
+            <a:r>
+              <a:rPr sz="1200" b="0">
+                <a:solidFill>
+                  <a:srgbClr val="205281"/>
+                </a:solidFill>
+                <a:latin typeface="Microsoft YaHei"/>
+                <a:ea typeface="Microsoft YaHei"/>
+                <a:cs typeface="Microsoft YaHei"/>
+              </a:rPr>
+              <a:t>实验数据</a:t>
+            </a:r>
+          </a:p>
+        </p:txBody>
+      </p:sp>
+      <p:sp>
+        <p:nvSpPr>
+          <p:cNvPr id="21" name="PPAGENT_QA|parent=technical-input-1|domains=technical-route-inputs">
+            <a:extLst xmlns:a="http://schemas.openxmlformats.org/drawingml/2006/main">
+              <a:ext uri="{FF2B5EF4-FFF2-40B4-BE49-F238E27FC236}">
+                <a16:creationId xmlns:a16="http://schemas.microsoft.com/office/drawing/2014/main" id="{3BAD2CF8-5DC6-43DC-87EA-8AFD1E22D999}"/>
+              </a:ext>
+            </a:extLst>
+          </p:cNvPr>
+          <p:cNvSpPr>
+            <a:spLocks xmlns:a="http://schemas.openxmlformats.org/drawingml/2006/main" noGrp="1"/>
+          </p:cNvSpPr>
+          <p:nvPr/>
+        </p:nvSpPr>
+        <p:spPr>
+          <a:xfrm xmlns:a="http://schemas.openxmlformats.org/drawingml/2006/main">
+            <a:off x="5257800" y="4572000"/>
+            <a:ext cx="1676400" cy="381000"/>
+          </a:xfrm>
+          <a:prstGeom xmlns:a="http://schemas.openxmlformats.org/drawingml/2006/main" prst="parallelogram">
+            <a:avLst/>
+          </a:prstGeom>
+          <a:solidFill xmlns:a="http://schemas.openxmlformats.org/drawingml/2006/main">
+            <a:srgbClr val="E6F0F8"/>
+          </a:solidFill>
+          <a:ln xmlns:a="http://schemas.openxmlformats.org/drawingml/2006/main" w="14288">
+            <a:solidFill>
+              <a:srgbClr val="6CA7DD"/>
+            </a:solidFill>
+            <a:prstDash val="solid"/>
+          </a:ln>
+        </p:spPr>
+        <p:txBody>
+          <a:bodyPr xmlns:a="http://schemas.openxmlformats.org/drawingml/2006/main" lIns="114300" tIns="76200" rIns="114300" bIns="76200" anchor="ctr">
+            <a:normAutofit fontScale="80413"/>
+          </a:bodyPr>
+          <a:lstStyle xmlns:a="http://schemas.openxmlformats.org/drawingml/2006/main"/>
+          <a:p xmlns:a="http://schemas.openxmlformats.org/drawingml/2006/main">
+            <a:pPr algn="ctr">
+              <a:defRPr sz="1200" b="0">
+                <a:solidFill>
+                  <a:srgbClr val="205281"/>
+                </a:solidFill>
+                <a:latin typeface="Microsoft YaHei"/>
+                <a:ea typeface="Microsoft YaHei"/>
+                <a:cs typeface="Microsoft YaHei"/>
+              </a:defRPr>
+            </a:pPr>
+            <a:r>
+              <a:rPr sz="1200" b="0">
+                <a:solidFill>
+                  <a:srgbClr val="205281"/>
+                </a:solidFill>
+                <a:latin typeface="Microsoft YaHei"/>
+                <a:ea typeface="Microsoft YaHei"/>
+                <a:cs typeface="Microsoft YaHei"/>
+              </a:rPr>
+              <a:t>现场观测</a:t>
+            </a:r>
+          </a:p>
+        </p:txBody>
+      </p:sp>
+      <p:sp>
+        <p:nvSpPr>
+          <p:cNvPr id="22" name="PPAGENT_QA|parent=technical-input-2|domains=technical-route-inputs">
+            <a:extLst xmlns:a="http://schemas.openxmlformats.org/drawingml/2006/main">
+              <a:ext uri="{FF2B5EF4-FFF2-40B4-BE49-F238E27FC236}">
+                <a16:creationId xmlns:a16="http://schemas.microsoft.com/office/drawing/2014/main" id="{AF23EA23-7B9A-431B-A0D6-82B52DFD8B0F}"/>
+              </a:ext>
+            </a:extLst>
+          </p:cNvPr>
+          <p:cNvSpPr>
+            <a:spLocks xmlns:a="http://schemas.openxmlformats.org/drawingml/2006/main" noGrp="1"/>
+          </p:cNvSpPr>
+          <p:nvPr/>
+        </p:nvSpPr>
+        <p:spPr>
+          <a:xfrm xmlns:a="http://schemas.openxmlformats.org/drawingml/2006/main">
+            <a:off x="7496175" y="4572000"/>
+            <a:ext cx="1676400" cy="381000"/>
+          </a:xfrm>
+          <a:prstGeom xmlns:a="http://schemas.openxmlformats.org/drawingml/2006/main" prst="parallelogram">
+            <a:avLst/>
+          </a:prstGeom>
+          <a:solidFill xmlns:a="http://schemas.openxmlformats.org/drawingml/2006/main">
+            <a:srgbClr val="E6F0F8"/>
+          </a:solidFill>
+          <a:ln xmlns:a="http://schemas.openxmlformats.org/drawingml/2006/main" w="14288">
+            <a:solidFill>
+              <a:srgbClr val="6CA7DD"/>
+            </a:solidFill>
+            <a:prstDash val="solid"/>
+          </a:ln>
+        </p:spPr>
+        <p:txBody>
+          <a:bodyPr xmlns:a="http://schemas.openxmlformats.org/drawingml/2006/main" lIns="114300" tIns="76200" rIns="114300" bIns="76200" anchor="ctr">
+            <a:normAutofit fontScale="80413"/>
+          </a:bodyPr>
+          <a:lstStyle xmlns:a="http://schemas.openxmlformats.org/drawingml/2006/main"/>
+          <a:p xmlns:a="http://schemas.openxmlformats.org/drawingml/2006/main">
+            <a:pPr algn="ctr">
+              <a:defRPr sz="1200" b="0">
+                <a:solidFill>
+                  <a:srgbClr val="205281"/>
+                </a:solidFill>
+                <a:latin typeface="Microsoft YaHei"/>
+                <a:ea typeface="Microsoft YaHei"/>
+                <a:cs typeface="Microsoft YaHei"/>
+              </a:defRPr>
+            </a:pPr>
+            <a:r>
+              <a:rPr sz="1200" b="0">
+                <a:solidFill>
+                  <a:srgbClr val="205281"/>
+                </a:solidFill>
+                <a:latin typeface="Microsoft YaHei"/>
+                <a:ea typeface="Microsoft YaHei"/>
+                <a:cs typeface="Microsoft YaHei"/>
+              </a:rPr>
+              <a:t>专家知识</a:t>
+            </a:r>
+          </a:p>
+        </p:txBody>
+      </p:sp>
+      <p:sp>
+        <p:nvSpPr>
+          <p:cNvPr id="23" name="PPAGENT_QA|parent=technical-analysis|domains=technical-route-main">
+            <a:extLst xmlns:a="http://schemas.openxmlformats.org/drawingml/2006/main">
+              <a:ext uri="{FF2B5EF4-FFF2-40B4-BE49-F238E27FC236}">
+                <a16:creationId xmlns:a16="http://schemas.microsoft.com/office/drawing/2014/main" id="{672F0386-9463-45E3-B682-6C91F1C144FD}"/>
+              </a:ext>
+            </a:extLst>
+          </p:cNvPr>
+          <p:cNvSpPr>
+            <a:spLocks xmlns:a="http://schemas.openxmlformats.org/drawingml/2006/main" noGrp="1"/>
+          </p:cNvSpPr>
+          <p:nvPr/>
+        </p:nvSpPr>
+        <p:spPr>
+          <a:xfrm xmlns:a="http://schemas.openxmlformats.org/drawingml/2006/main">
+            <a:off x="4095750" y="5181600"/>
+            <a:ext cx="4000500" cy="457200"/>
           </a:xfrm>
           <a:prstGeom xmlns:a="http://schemas.openxmlformats.org/drawingml/2006/main" prst="roundRect">
             <a:avLst>
-              <a:gd name="adj" fmla="val 26087"/>
+              <a:gd name="adj" fmla="val 25000"/>
             </a:avLst>
           </a:prstGeom>
           <a:solidFill xmlns:a="http://schemas.openxmlformats.org/drawingml/2006/main">
-            <a:srgbClr val="C9DFF3"/>
+            <a:srgbClr val="BFD9F1"/>
           </a:solidFill>
           <a:ln xmlns:a="http://schemas.openxmlformats.org/drawingml/2006/main" w="14288">
             <a:solidFill>
@@ -1603,17 +2205,17 @@
                 <a:ea typeface="Microsoft YaHei"/>
                 <a:cs typeface="Microsoft YaHei"/>
               </a:rPr>
-              <a:t>确定整体优化目标</a:t>
+              <a:t>分析变量关系并验证模型稳健性</a:t>
             </a:r>
           </a:p>
         </p:txBody>
       </p:sp>
       <p:sp>
         <p:nvSpPr>
-          <p:cNvPr id="14" name="">
+          <p:cNvPr id="24" name="">
             <a:extLst xmlns:a="http://schemas.openxmlformats.org/drawingml/2006/main">
               <a:ext uri="{FF2B5EF4-FFF2-40B4-BE49-F238E27FC236}">
-                <a16:creationId xmlns:a16="http://schemas.microsoft.com/office/drawing/2014/main" id="{66DADDA7-371E-4AA9-A0A0-2CFC3A2BE4B8}"/>
+                <a16:creationId xmlns:a16="http://schemas.microsoft.com/office/drawing/2014/main" id="{12A21F7A-E381-4974-9656-C6A53A199EF5}"/>
               </a:ext>
             </a:extLst>
           </p:cNvPr>
@@ -1624,16 +2226,16 @@
         </p:nvSpPr>
         <p:spPr>
           <a:xfrm xmlns:a="http://schemas.openxmlformats.org/drawingml/2006/main">
-            <a:off x="1857375" y="3276600"/>
-            <a:ext cx="2000250" cy="438150"/>
+            <a:off x="5191125" y="5791200"/>
+            <a:ext cx="1809750" cy="361950"/>
           </a:xfrm>
           <a:prstGeom xmlns:a="http://schemas.openxmlformats.org/drawingml/2006/main" prst="roundRect">
             <a:avLst>
-              <a:gd name="adj" fmla="val 26087"/>
+              <a:gd name="adj" fmla="val 31579"/>
             </a:avLst>
           </a:prstGeom>
           <a:solidFill xmlns:a="http://schemas.openxmlformats.org/drawingml/2006/main">
-            <a:srgbClr val="D6E7F6"/>
+            <a:srgbClr val="C9DFF3"/>
           </a:solidFill>
           <a:ln xmlns:a="http://schemas.openxmlformats.org/drawingml/2006/main" w="14288">
             <a:solidFill>
@@ -1642,515 +2244,15 @@
             <a:prstDash val="solid"/>
           </a:ln>
         </p:spPr>
+        <p:style>
+          <a:lnRef xmlns:a="http://schemas.openxmlformats.org/drawingml/2006/main" idx="0"/>
+          <a:fillRef xmlns:a="http://schemas.openxmlformats.org/drawingml/2006/main" idx="0"/>
+          <a:effectRef xmlns:a="http://schemas.openxmlformats.org/drawingml/2006/main" idx="4"/>
+          <a:fontRef xmlns:a="http://schemas.openxmlformats.org/drawingml/2006/main" idx="major"/>
+        </p:style>
         <p:txBody>
           <a:bodyPr xmlns:a="http://schemas.openxmlformats.org/drawingml/2006/main" lIns="114300" tIns="76200" rIns="114300" bIns="76200" anchor="ctr">
-            <a:normAutofit fontScale="100000"/>
-          </a:bodyPr>
-          <a:lstStyle xmlns:a="http://schemas.openxmlformats.org/drawingml/2006/main"/>
-          <a:p xmlns:a="http://schemas.openxmlformats.org/drawingml/2006/main">
-            <a:pPr algn="ctr">
-              <a:defRPr sz="1200" b="0">
-                <a:solidFill>
-                  <a:srgbClr val="205281"/>
-                </a:solidFill>
-                <a:latin typeface="Microsoft YaHei"/>
-                <a:ea typeface="Microsoft YaHei"/>
-                <a:cs typeface="Microsoft YaHei"/>
-              </a:defRPr>
-            </a:pPr>
-            <a:r>
-              <a:rPr sz="1200" b="0">
-                <a:solidFill>
-                  <a:srgbClr val="205281"/>
-                </a:solidFill>
-                <a:latin typeface="Microsoft YaHei"/>
-                <a:ea typeface="Microsoft YaHei"/>
-                <a:cs typeface="Microsoft YaHei"/>
-              </a:rPr>
-              <a:t>性能目标</a:t>
-            </a:r>
-          </a:p>
-        </p:txBody>
-      </p:sp>
-      <p:sp>
-        <p:nvSpPr>
-          <p:cNvPr id="15" name="">
-            <a:extLst xmlns:a="http://schemas.openxmlformats.org/drawingml/2006/main">
-              <a:ext uri="{FF2B5EF4-FFF2-40B4-BE49-F238E27FC236}">
-                <a16:creationId xmlns:a16="http://schemas.microsoft.com/office/drawing/2014/main" id="{866A7B61-E036-4CBF-BE10-A02064B3001B}"/>
-              </a:ext>
-            </a:extLst>
-          </p:cNvPr>
-          <p:cNvSpPr>
-            <a:spLocks xmlns:a="http://schemas.openxmlformats.org/drawingml/2006/main" noGrp="1"/>
-          </p:cNvSpPr>
-          <p:nvPr/>
-        </p:nvSpPr>
-        <p:spPr>
-          <a:xfrm xmlns:a="http://schemas.openxmlformats.org/drawingml/2006/main">
-            <a:off x="5095875" y="3276600"/>
-            <a:ext cx="2000250" cy="438150"/>
-          </a:xfrm>
-          <a:prstGeom xmlns:a="http://schemas.openxmlformats.org/drawingml/2006/main" prst="roundRect">
-            <a:avLst>
-              <a:gd name="adj" fmla="val 26087"/>
-            </a:avLst>
-          </a:prstGeom>
-          <a:solidFill xmlns:a="http://schemas.openxmlformats.org/drawingml/2006/main">
-            <a:srgbClr val="D6E7F6"/>
-          </a:solidFill>
-          <a:ln xmlns:a="http://schemas.openxmlformats.org/drawingml/2006/main" w="14288">
-            <a:solidFill>
-              <a:srgbClr val="6CA7DD"/>
-            </a:solidFill>
-            <a:prstDash val="solid"/>
-          </a:ln>
-        </p:spPr>
-        <p:txBody>
-          <a:bodyPr xmlns:a="http://schemas.openxmlformats.org/drawingml/2006/main" lIns="114300" tIns="76200" rIns="114300" bIns="76200" anchor="ctr">
-            <a:normAutofit fontScale="100000"/>
-          </a:bodyPr>
-          <a:lstStyle xmlns:a="http://schemas.openxmlformats.org/drawingml/2006/main"/>
-          <a:p xmlns:a="http://schemas.openxmlformats.org/drawingml/2006/main">
-            <a:pPr algn="ctr">
-              <a:defRPr sz="1200" b="0">
-                <a:solidFill>
-                  <a:srgbClr val="205281"/>
-                </a:solidFill>
-                <a:latin typeface="Microsoft YaHei"/>
-                <a:ea typeface="Microsoft YaHei"/>
-                <a:cs typeface="Microsoft YaHei"/>
-              </a:defRPr>
-            </a:pPr>
-            <a:r>
-              <a:rPr sz="1200" b="0">
-                <a:solidFill>
-                  <a:srgbClr val="205281"/>
-                </a:solidFill>
-                <a:latin typeface="Microsoft YaHei"/>
-                <a:ea typeface="Microsoft YaHei"/>
-                <a:cs typeface="Microsoft YaHei"/>
-              </a:rPr>
-              <a:t>生态目标</a:t>
-            </a:r>
-          </a:p>
-        </p:txBody>
-      </p:sp>
-      <p:sp>
-        <p:nvSpPr>
-          <p:cNvPr id="16" name="">
-            <a:extLst xmlns:a="http://schemas.openxmlformats.org/drawingml/2006/main">
-              <a:ext uri="{FF2B5EF4-FFF2-40B4-BE49-F238E27FC236}">
-                <a16:creationId xmlns:a16="http://schemas.microsoft.com/office/drawing/2014/main" id="{493FAB40-3CE8-4308-B550-A88815439295}"/>
-              </a:ext>
-            </a:extLst>
-          </p:cNvPr>
-          <p:cNvSpPr>
-            <a:spLocks xmlns:a="http://schemas.openxmlformats.org/drawingml/2006/main" noGrp="1"/>
-          </p:cNvSpPr>
-          <p:nvPr/>
-        </p:nvSpPr>
-        <p:spPr>
-          <a:xfrm xmlns:a="http://schemas.openxmlformats.org/drawingml/2006/main">
-            <a:off x="8334375" y="3276600"/>
-            <a:ext cx="2000250" cy="438150"/>
-          </a:xfrm>
-          <a:prstGeom xmlns:a="http://schemas.openxmlformats.org/drawingml/2006/main" prst="roundRect">
-            <a:avLst>
-              <a:gd name="adj" fmla="val 26087"/>
-            </a:avLst>
-          </a:prstGeom>
-          <a:solidFill xmlns:a="http://schemas.openxmlformats.org/drawingml/2006/main">
-            <a:srgbClr val="D6E7F6"/>
-          </a:solidFill>
-          <a:ln xmlns:a="http://schemas.openxmlformats.org/drawingml/2006/main" w="14288">
-            <a:solidFill>
-              <a:srgbClr val="6CA7DD"/>
-            </a:solidFill>
-            <a:prstDash val="solid"/>
-          </a:ln>
-        </p:spPr>
-        <p:txBody>
-          <a:bodyPr xmlns:a="http://schemas.openxmlformats.org/drawingml/2006/main" lIns="114300" tIns="76200" rIns="114300" bIns="76200" anchor="ctr">
-            <a:normAutofit fontScale="100000"/>
-          </a:bodyPr>
-          <a:lstStyle xmlns:a="http://schemas.openxmlformats.org/drawingml/2006/main"/>
-          <a:p xmlns:a="http://schemas.openxmlformats.org/drawingml/2006/main">
-            <a:pPr algn="ctr">
-              <a:defRPr sz="1200" b="0">
-                <a:solidFill>
-                  <a:srgbClr val="205281"/>
-                </a:solidFill>
-                <a:latin typeface="Microsoft YaHei"/>
-                <a:ea typeface="Microsoft YaHei"/>
-                <a:cs typeface="Microsoft YaHei"/>
-              </a:defRPr>
-            </a:pPr>
-            <a:r>
-              <a:rPr sz="1200" b="0">
-                <a:solidFill>
-                  <a:srgbClr val="205281"/>
-                </a:solidFill>
-                <a:latin typeface="Microsoft YaHei"/>
-                <a:ea typeface="Microsoft YaHei"/>
-                <a:cs typeface="Microsoft YaHei"/>
-              </a:rPr>
-              <a:t>可靠性目标</a:t>
-            </a:r>
-          </a:p>
-        </p:txBody>
-      </p:sp>
-      <p:sp>
-        <p:nvSpPr>
-          <p:cNvPr id="17" name="">
-            <a:extLst xmlns:a="http://schemas.openxmlformats.org/drawingml/2006/main">
-              <a:ext uri="{FF2B5EF4-FFF2-40B4-BE49-F238E27FC236}">
-                <a16:creationId xmlns:a16="http://schemas.microsoft.com/office/drawing/2014/main" id="{3193987C-FAD5-45E3-BB61-6D7FEC324892}"/>
-              </a:ext>
-            </a:extLst>
-          </p:cNvPr>
-          <p:cNvSpPr>
-            <a:spLocks xmlns:a="http://schemas.openxmlformats.org/drawingml/2006/main" noGrp="1"/>
-          </p:cNvSpPr>
-          <p:nvPr/>
-        </p:nvSpPr>
-        <p:spPr>
-          <a:xfrm xmlns:a="http://schemas.openxmlformats.org/drawingml/2006/main">
-            <a:off x="4238625" y="3943350"/>
-            <a:ext cx="3714750" cy="476250"/>
-          </a:xfrm>
-          <a:prstGeom xmlns:a="http://schemas.openxmlformats.org/drawingml/2006/main" prst="roundRect">
-            <a:avLst>
-              <a:gd name="adj" fmla="val 24000"/>
-            </a:avLst>
-          </a:prstGeom>
-          <a:solidFill xmlns:a="http://schemas.openxmlformats.org/drawingml/2006/main">
-            <a:srgbClr val="BFD9F1"/>
-          </a:solidFill>
-          <a:ln xmlns:a="http://schemas.openxmlformats.org/drawingml/2006/main" w="14288">
-            <a:solidFill>
-              <a:srgbClr val="6CA7DD"/>
-            </a:solidFill>
-            <a:prstDash val="solid"/>
-          </a:ln>
-        </p:spPr>
-        <p:txBody>
-          <a:bodyPr xmlns:a="http://schemas.openxmlformats.org/drawingml/2006/main" lIns="114300" tIns="76200" rIns="114300" bIns="76200" anchor="ctr">
-            <a:normAutofit fontScale="100000"/>
-          </a:bodyPr>
-          <a:lstStyle xmlns:a="http://schemas.openxmlformats.org/drawingml/2006/main"/>
-          <a:p xmlns:a="http://schemas.openxmlformats.org/drawingml/2006/main">
-            <a:pPr algn="ctr">
-              <a:defRPr sz="1350" b="1">
-                <a:solidFill>
-                  <a:srgbClr val="205281"/>
-                </a:solidFill>
-                <a:latin typeface="Microsoft YaHei"/>
-                <a:ea typeface="Microsoft YaHei"/>
-                <a:cs typeface="Microsoft YaHei"/>
-              </a:defRPr>
-            </a:pPr>
-            <a:r>
-              <a:rPr sz="1350" b="1">
-                <a:solidFill>
-                  <a:srgbClr val="205281"/>
-                </a:solidFill>
-                <a:latin typeface="Microsoft YaHei"/>
-                <a:ea typeface="Microsoft YaHei"/>
-                <a:cs typeface="Microsoft YaHei"/>
-              </a:rPr>
-              <a:t>构建多目标分析与决策模型</a:t>
-            </a:r>
-          </a:p>
-        </p:txBody>
-      </p:sp>
-      <p:sp>
-        <p:nvSpPr>
-          <p:cNvPr id="18" name="">
-            <a:extLst xmlns:a="http://schemas.openxmlformats.org/drawingml/2006/main">
-              <a:ext uri="{FF2B5EF4-FFF2-40B4-BE49-F238E27FC236}">
-                <a16:creationId xmlns:a16="http://schemas.microsoft.com/office/drawing/2014/main" id="{2B39F375-9319-4EA8-91A8-1A2585E23BE8}"/>
-              </a:ext>
-            </a:extLst>
-          </p:cNvPr>
-          <p:cNvSpPr>
-            <a:spLocks xmlns:a="http://schemas.openxmlformats.org/drawingml/2006/main" noGrp="1"/>
-          </p:cNvSpPr>
-          <p:nvPr/>
-        </p:nvSpPr>
-        <p:spPr>
-          <a:xfrm xmlns:a="http://schemas.openxmlformats.org/drawingml/2006/main">
-            <a:off x="2571750" y="4629150"/>
-            <a:ext cx="1905000" cy="400050"/>
-          </a:xfrm>
-          <a:prstGeom xmlns:a="http://schemas.openxmlformats.org/drawingml/2006/main" prst="parallelogram">
-            <a:avLst/>
-          </a:prstGeom>
-          <a:solidFill xmlns:a="http://schemas.openxmlformats.org/drawingml/2006/main">
-            <a:srgbClr val="E6F0F8"/>
-          </a:solidFill>
-          <a:ln xmlns:a="http://schemas.openxmlformats.org/drawingml/2006/main" w="14288">
-            <a:solidFill>
-              <a:srgbClr val="6CA7DD"/>
-            </a:solidFill>
-            <a:prstDash val="solid"/>
-          </a:ln>
-        </p:spPr>
-        <p:txBody>
-          <a:bodyPr xmlns:a="http://schemas.openxmlformats.org/drawingml/2006/main" lIns="114300" tIns="76200" rIns="114300" bIns="76200" anchor="ctr">
-            <a:normAutofit fontScale="95347"/>
-          </a:bodyPr>
-          <a:lstStyle xmlns:a="http://schemas.openxmlformats.org/drawingml/2006/main"/>
-          <a:p xmlns:a="http://schemas.openxmlformats.org/drawingml/2006/main">
-            <a:pPr algn="ctr">
-              <a:defRPr sz="1125" b="0">
-                <a:solidFill>
-                  <a:srgbClr val="205281"/>
-                </a:solidFill>
-                <a:latin typeface="Microsoft YaHei"/>
-                <a:ea typeface="Microsoft YaHei"/>
-                <a:cs typeface="Microsoft YaHei"/>
-              </a:defRPr>
-            </a:pPr>
-            <a:r>
-              <a:rPr sz="1125" b="0">
-                <a:solidFill>
-                  <a:srgbClr val="205281"/>
-                </a:solidFill>
-                <a:latin typeface="Microsoft YaHei"/>
-                <a:ea typeface="Microsoft YaHei"/>
-                <a:cs typeface="Microsoft YaHei"/>
-              </a:rPr>
-              <a:t>实验数据</a:t>
-            </a:r>
-          </a:p>
-        </p:txBody>
-      </p:sp>
-      <p:sp>
-        <p:nvSpPr>
-          <p:cNvPr id="19" name="">
-            <a:extLst xmlns:a="http://schemas.openxmlformats.org/drawingml/2006/main">
-              <a:ext uri="{FF2B5EF4-FFF2-40B4-BE49-F238E27FC236}">
-                <a16:creationId xmlns:a16="http://schemas.microsoft.com/office/drawing/2014/main" id="{755E1002-3F70-4245-9AAC-FC53FD93363F}"/>
-              </a:ext>
-            </a:extLst>
-          </p:cNvPr>
-          <p:cNvSpPr>
-            <a:spLocks xmlns:a="http://schemas.openxmlformats.org/drawingml/2006/main" noGrp="1"/>
-          </p:cNvSpPr>
-          <p:nvPr/>
-        </p:nvSpPr>
-        <p:spPr>
-          <a:xfrm xmlns:a="http://schemas.openxmlformats.org/drawingml/2006/main">
-            <a:off x="5143500" y="4629150"/>
-            <a:ext cx="1905000" cy="400050"/>
-          </a:xfrm>
-          <a:prstGeom xmlns:a="http://schemas.openxmlformats.org/drawingml/2006/main" prst="parallelogram">
-            <a:avLst/>
-          </a:prstGeom>
-          <a:solidFill xmlns:a="http://schemas.openxmlformats.org/drawingml/2006/main">
-            <a:srgbClr val="E6F0F8"/>
-          </a:solidFill>
-          <a:ln xmlns:a="http://schemas.openxmlformats.org/drawingml/2006/main" w="14288">
-            <a:solidFill>
-              <a:srgbClr val="6CA7DD"/>
-            </a:solidFill>
-            <a:prstDash val="solid"/>
-          </a:ln>
-        </p:spPr>
-        <p:txBody>
-          <a:bodyPr xmlns:a="http://schemas.openxmlformats.org/drawingml/2006/main" lIns="114300" tIns="76200" rIns="114300" bIns="76200" anchor="ctr">
-            <a:normAutofit fontScale="95347"/>
-          </a:bodyPr>
-          <a:lstStyle xmlns:a="http://schemas.openxmlformats.org/drawingml/2006/main"/>
-          <a:p xmlns:a="http://schemas.openxmlformats.org/drawingml/2006/main">
-            <a:pPr algn="ctr">
-              <a:defRPr sz="1125" b="0">
-                <a:solidFill>
-                  <a:srgbClr val="205281"/>
-                </a:solidFill>
-                <a:latin typeface="Microsoft YaHei"/>
-                <a:ea typeface="Microsoft YaHei"/>
-                <a:cs typeface="Microsoft YaHei"/>
-              </a:defRPr>
-            </a:pPr>
-            <a:r>
-              <a:rPr sz="1125" b="0">
-                <a:solidFill>
-                  <a:srgbClr val="205281"/>
-                </a:solidFill>
-                <a:latin typeface="Microsoft YaHei"/>
-                <a:ea typeface="Microsoft YaHei"/>
-                <a:cs typeface="Microsoft YaHei"/>
-              </a:rPr>
-              <a:t>现场观测</a:t>
-            </a:r>
-          </a:p>
-        </p:txBody>
-      </p:sp>
-      <p:sp>
-        <p:nvSpPr>
-          <p:cNvPr id="20" name="">
-            <a:extLst xmlns:a="http://schemas.openxmlformats.org/drawingml/2006/main">
-              <a:ext uri="{FF2B5EF4-FFF2-40B4-BE49-F238E27FC236}">
-                <a16:creationId xmlns:a16="http://schemas.microsoft.com/office/drawing/2014/main" id="{3C5A7B9D-95EA-436D-8DA9-76E063C712BA}"/>
-              </a:ext>
-            </a:extLst>
-          </p:cNvPr>
-          <p:cNvSpPr>
-            <a:spLocks xmlns:a="http://schemas.openxmlformats.org/drawingml/2006/main" noGrp="1"/>
-          </p:cNvSpPr>
-          <p:nvPr/>
-        </p:nvSpPr>
-        <p:spPr>
-          <a:xfrm xmlns:a="http://schemas.openxmlformats.org/drawingml/2006/main">
-            <a:off x="7715250" y="4629150"/>
-            <a:ext cx="1905000" cy="400050"/>
-          </a:xfrm>
-          <a:prstGeom xmlns:a="http://schemas.openxmlformats.org/drawingml/2006/main" prst="parallelogram">
-            <a:avLst/>
-          </a:prstGeom>
-          <a:solidFill xmlns:a="http://schemas.openxmlformats.org/drawingml/2006/main">
-            <a:srgbClr val="E6F0F8"/>
-          </a:solidFill>
-          <a:ln xmlns:a="http://schemas.openxmlformats.org/drawingml/2006/main" w="14288">
-            <a:solidFill>
-              <a:srgbClr val="6CA7DD"/>
-            </a:solidFill>
-            <a:prstDash val="solid"/>
-          </a:ln>
-        </p:spPr>
-        <p:txBody>
-          <a:bodyPr xmlns:a="http://schemas.openxmlformats.org/drawingml/2006/main" lIns="114300" tIns="76200" rIns="114300" bIns="76200" anchor="ctr">
-            <a:normAutofit fontScale="95347"/>
-          </a:bodyPr>
-          <a:lstStyle xmlns:a="http://schemas.openxmlformats.org/drawingml/2006/main"/>
-          <a:p xmlns:a="http://schemas.openxmlformats.org/drawingml/2006/main">
-            <a:pPr algn="ctr">
-              <a:defRPr sz="1125" b="0">
-                <a:solidFill>
-                  <a:srgbClr val="205281"/>
-                </a:solidFill>
-                <a:latin typeface="Microsoft YaHei"/>
-                <a:ea typeface="Microsoft YaHei"/>
-                <a:cs typeface="Microsoft YaHei"/>
-              </a:defRPr>
-            </a:pPr>
-            <a:r>
-              <a:rPr sz="1125" b="0">
-                <a:solidFill>
-                  <a:srgbClr val="205281"/>
-                </a:solidFill>
-                <a:latin typeface="Microsoft YaHei"/>
-                <a:ea typeface="Microsoft YaHei"/>
-                <a:cs typeface="Microsoft YaHei"/>
-              </a:rPr>
-              <a:t>专家知识</a:t>
-            </a:r>
-          </a:p>
-        </p:txBody>
-      </p:sp>
-      <p:sp>
-        <p:nvSpPr>
-          <p:cNvPr id="21" name="">
-            <a:extLst xmlns:a="http://schemas.openxmlformats.org/drawingml/2006/main">
-              <a:ext uri="{FF2B5EF4-FFF2-40B4-BE49-F238E27FC236}">
-                <a16:creationId xmlns:a16="http://schemas.microsoft.com/office/drawing/2014/main" id="{81F550E6-D628-4F3C-B15F-7314949FA57C}"/>
-              </a:ext>
-            </a:extLst>
-          </p:cNvPr>
-          <p:cNvSpPr>
-            <a:spLocks xmlns:a="http://schemas.openxmlformats.org/drawingml/2006/main" noGrp="1"/>
-          </p:cNvSpPr>
-          <p:nvPr/>
-        </p:nvSpPr>
-        <p:spPr>
-          <a:xfrm xmlns:a="http://schemas.openxmlformats.org/drawingml/2006/main">
-            <a:off x="4095750" y="5276850"/>
-            <a:ext cx="4000500" cy="476250"/>
-          </a:xfrm>
-          <a:prstGeom xmlns:a="http://schemas.openxmlformats.org/drawingml/2006/main" prst="roundRect">
-            <a:avLst>
-              <a:gd name="adj" fmla="val 24000"/>
-            </a:avLst>
-          </a:prstGeom>
-          <a:solidFill xmlns:a="http://schemas.openxmlformats.org/drawingml/2006/main">
-            <a:srgbClr val="BFD9F1"/>
-          </a:solidFill>
-          <a:ln xmlns:a="http://schemas.openxmlformats.org/drawingml/2006/main" w="14288">
-            <a:solidFill>
-              <a:srgbClr val="6CA7DD"/>
-            </a:solidFill>
-            <a:prstDash val="solid"/>
-          </a:ln>
-        </p:spPr>
-        <p:txBody>
-          <a:bodyPr xmlns:a="http://schemas.openxmlformats.org/drawingml/2006/main" lIns="114300" tIns="76200" rIns="114300" bIns="76200" anchor="ctr">
-            <a:normAutofit fontScale="100000"/>
-          </a:bodyPr>
-          <a:lstStyle xmlns:a="http://schemas.openxmlformats.org/drawingml/2006/main"/>
-          <a:p xmlns:a="http://schemas.openxmlformats.org/drawingml/2006/main">
-            <a:pPr algn="ctr">
-              <a:defRPr sz="1350" b="1">
-                <a:solidFill>
-                  <a:srgbClr val="205281"/>
-                </a:solidFill>
-                <a:latin typeface="Microsoft YaHei"/>
-                <a:ea typeface="Microsoft YaHei"/>
-                <a:cs typeface="Microsoft YaHei"/>
-              </a:defRPr>
-            </a:pPr>
-            <a:r>
-              <a:rPr sz="1350" b="1">
-                <a:solidFill>
-                  <a:srgbClr val="205281"/>
-                </a:solidFill>
-                <a:latin typeface="Microsoft YaHei"/>
-                <a:ea typeface="Microsoft YaHei"/>
-                <a:cs typeface="Microsoft YaHei"/>
-              </a:rPr>
-              <a:t>分析变量关系并验证模型稳健性</a:t>
-            </a:r>
-          </a:p>
-        </p:txBody>
-      </p:sp>
-      <p:sp>
-        <p:nvSpPr>
-          <p:cNvPr id="22" name="">
-            <a:extLst xmlns:a="http://schemas.openxmlformats.org/drawingml/2006/main">
-              <a:ext uri="{FF2B5EF4-FFF2-40B4-BE49-F238E27FC236}">
-                <a16:creationId xmlns:a16="http://schemas.microsoft.com/office/drawing/2014/main" id="{B0D2DB56-C5C2-461A-8B85-DAF57C659D7D}"/>
-              </a:ext>
-            </a:extLst>
-          </p:cNvPr>
-          <p:cNvSpPr>
-            <a:spLocks xmlns:a="http://schemas.openxmlformats.org/drawingml/2006/main" noGrp="1"/>
-          </p:cNvSpPr>
-          <p:nvPr/>
-        </p:nvSpPr>
-        <p:spPr>
-          <a:xfrm xmlns:a="http://schemas.openxmlformats.org/drawingml/2006/main">
-            <a:off x="5191125" y="5962650"/>
-            <a:ext cx="1809750" cy="381000"/>
-          </a:xfrm>
-          <a:prstGeom xmlns:a="http://schemas.openxmlformats.org/drawingml/2006/main" prst="roundRect">
-            <a:avLst>
-              <a:gd name="adj" fmla="val 30000"/>
-            </a:avLst>
-          </a:prstGeom>
-          <a:solidFill xmlns:a="http://schemas.openxmlformats.org/drawingml/2006/main">
-            <a:srgbClr val="BFD9F1"/>
-          </a:solidFill>
-          <a:ln xmlns:a="http://schemas.openxmlformats.org/drawingml/2006/main" w="14288">
-            <a:solidFill>
-              <a:srgbClr val="6CA7DD"/>
-            </a:solidFill>
-            <a:prstDash val="solid"/>
-          </a:ln>
-        </p:spPr>
-        <p:txBody>
-          <a:bodyPr xmlns:a="http://schemas.openxmlformats.org/drawingml/2006/main" lIns="114300" tIns="76200" rIns="114300" bIns="76200" anchor="ctr">
-            <a:normAutofit fontScale="83189"/>
+            <a:normAutofit fontScale="73385"/>
           </a:bodyPr>
           <a:lstStyle xmlns:a="http://schemas.openxmlformats.org/drawingml/2006/main"/>
           <a:p xmlns:a="http://schemas.openxmlformats.org/drawingml/2006/main">
@@ -2181,7 +2283,7 @@
     </p:spTree>
     <p:extLst>
       <p:ext uri="{BB962C8B-B14F-4D97-AF65-F5344CB8AC3E}">
-        <p14:creationId xmlns:p14="http://schemas.microsoft.com/office/powerpoint/2010/main" val="1764784950"/>
+        <p14:creationId xmlns:p14="http://schemas.microsoft.com/office/powerpoint/2010/main" val="1212707845"/>
       </p:ext>
     </p:extLst>
   </p:cSld>
